--- a/project-management/DailyDutch-presentation.pptx
+++ b/project-management/DailyDutch-presentation.pptx
@@ -9,8 +9,10 @@
     <p:sldId id="257" r:id="rId3"/>
     <p:sldId id="258" r:id="rId4"/>
     <p:sldId id="259" r:id="rId5"/>
+    <p:sldId id="264" r:id="rId15"/>
     <p:sldId id="260" r:id="rId6"/>
     <p:sldId id="261" r:id="rId7"/>
+    <p:sldId id="265" r:id="rId16"/>
     <p:sldId id="262" r:id="rId8"/>
     <p:sldId id="263" r:id="rId9"/>
   </p:sldIdLst>
@@ -1929,9 +1931,934 @@
                   <a:schemeClr val="accent1"/>
                 </a:solidFill>
               </a:rPr>
-              <a:t>15 – 29 October 2026</a:t>
+              <a:t>15 – 31 October 2026 · dailydutch.vercel.app</a:t>
             </a:r>
             <a:endParaRPr lang="en-US" sz="1500" dirty="0"/>
+          </a:p>
+        </p:txBody>
+      </p:sp>
+    </p:spTree>
+  </p:cSld>
+  <p:clrMapOvr>
+    <a:masterClrMapping/>
+  </p:clrMapOvr>
+</p:sld>
+</file>
+
+<file path=ppt/slides/slide10.xml><?xml version="1.0" encoding="utf-8"?>
+<p:sld xmlns:a="http://schemas.openxmlformats.org/drawingml/2006/main" xmlns:r="http://schemas.openxmlformats.org/officeDocument/2006/relationships" xmlns:p="http://schemas.openxmlformats.org/presentationml/2006/main">
+  <p:cSld name="Slide 3">
+    <p:spTree>
+      <p:nvGrpSpPr>
+        <p:cNvPr id="1" name=""/>
+        <p:cNvGrpSpPr/>
+        <p:nvPr/>
+      </p:nvGrpSpPr>
+      <p:grpSpPr>
+        <a:xfrm>
+          <a:off x="0" y="0"/>
+          <a:ext cx="0" cy="0"/>
+          <a:chOff x="0" y="0"/>
+          <a:chExt cx="0" cy="0"/>
+        </a:xfrm>
+      </p:grpSpPr>
+      <p:sp>
+        <p:nvSpPr>
+          <p:cNvPr id="2" name="Text 0"/>
+          <p:cNvSpPr/>
+          <p:nvPr>
+            <p:ph idx="100" type="title" hasCustomPrompt="1"/>
+          </p:nvPr>
+        </p:nvSpPr>
+        <p:spPr>
+          <a:xfrm>
+            <a:off x="548640" y="320040"/>
+            <a:ext cx="11064240" cy="822960"/>
+          </a:xfrm>
+          <a:prstGeom prst="rect">
+            <a:avLst/>
+          </a:prstGeom>
+          <a:noFill/>
+          <a:ln/>
+        </p:spPr>
+        <p:txBody>
+          <a:bodyPr wrap="square" rtlCol="0" anchor="ctr"/>
+          <a:lstStyle/>
+          <a:p>
+            <a:pPr indent="0" marL="0">
+              <a:buNone/>
+            </a:pPr>
+            <a:r>
+              <a:rPr lang="en-US" sz="3400" b="1" dirty="0">
+                <a:solidFill>
+                  <a:schemeClr val="tx1"/>
+                </a:solidFill>
+                <a:latin typeface="Cambria" pitchFamily="34" charset="0"/>
+                <a:ea typeface="Cambria" pitchFamily="34" charset="-122"/>
+                <a:cs typeface="Cambria" pitchFamily="34" charset="-120"/>
+              </a:rPr>
+              <a:t>What I built</a:t>
+            </a:r>
+            <a:endParaRPr lang="en-US" sz="3400" dirty="0"/>
+          </a:p>
+        </p:txBody>
+      </p:sp>
+      <p:sp>
+        <p:nvSpPr>
+          <p:cNvPr id="114" name="Card 114"/>
+          <p:cNvSpPr/>
+          <p:nvPr/>
+        </p:nvSpPr>
+        <p:spPr>
+          <a:xfrm>
+            <a:off x="548640" y="1371600"/>
+            <a:ext cx="2225040" cy="2194560"/>
+          </a:xfrm>
+          <a:prstGeom prst="roundRect">
+            <a:avLst>
+              <a:gd name="adj" fmla="val 5000"/>
+            </a:avLst>
+          </a:prstGeom>
+          <a:solidFill>
+            <a:schemeClr val="bg2"/>
+          </a:solidFill>
+          <a:ln w="12700">
+            <a:solidFill>
+              <a:schemeClr val="bg2"/>
+            </a:solidFill>
+          </a:ln>
+        </p:spPr>
+      </p:sp>
+      <p:sp>
+        <p:nvSpPr>
+          <p:cNvPr id="115" name="Text 115"/>
+          <p:cNvSpPr txBox="1"/>
+          <p:nvPr/>
+        </p:nvSpPr>
+        <p:spPr>
+          <a:xfrm>
+            <a:off x="777240" y="1645920"/>
+            <a:ext cx="1767840" cy="548640"/>
+          </a:xfrm>
+          <a:prstGeom prst="rect">
+            <a:avLst/>
+          </a:prstGeom>
+          <a:noFill/>
+        </p:spPr>
+        <p:txBody>
+          <a:bodyPr wrap="square" lIns="0" tIns="0" rIns="0" bIns="0" rtlCol="0" anchor="t"/>
+          <a:lstStyle/>
+          <a:p>
+            <a:pPr indent="0" marL="0">
+              <a:spcAft>
+                <a:spcPts val="0"/>
+              </a:spcAft>
+              <a:buNone/>
+            </a:pPr>
+            <a:r>
+              <a:rPr lang="en-US" sz="2400" b="1" dirty="0">
+                <a:solidFill>
+                  <a:schemeClr val="accent1"/>
+                </a:solidFill>
+                <a:latin typeface="Cambria" pitchFamily="34" charset="0"/>
+              </a:rPr>
+              <a:t>01</a:t>
+            </a:r>
+          </a:p>
+        </p:txBody>
+      </p:sp>
+      <p:sp>
+        <p:nvSpPr>
+          <p:cNvPr id="116" name="Text 116"/>
+          <p:cNvSpPr txBox="1"/>
+          <p:nvPr/>
+        </p:nvSpPr>
+        <p:spPr>
+          <a:xfrm>
+            <a:off x="777240" y="2240280"/>
+            <a:ext cx="1767840" cy="1097280"/>
+          </a:xfrm>
+          <a:prstGeom prst="rect">
+            <a:avLst/>
+          </a:prstGeom>
+          <a:noFill/>
+        </p:spPr>
+        <p:txBody>
+          <a:bodyPr wrap="square" lIns="0" tIns="0" rIns="0" bIns="0" rtlCol="0" anchor="t"/>
+          <a:lstStyle/>
+          <a:p>
+            <a:pPr indent="0" marL="0">
+              <a:spcAft>
+                <a:spcPts val="600"/>
+              </a:spcAft>
+              <a:buNone/>
+            </a:pPr>
+            <a:r>
+              <a:rPr lang="en-US" sz="1700" b="1" dirty="0">
+                <a:solidFill>
+                  <a:schemeClr val="tx1"/>
+                </a:solidFill>
+              </a:rPr>
+              <a:t>Daily lesson</a:t>
+            </a:r>
+          </a:p>
+          <a:p>
+            <a:pPr indent="0" marL="0">
+              <a:spcAft>
+                <a:spcPts val="0"/>
+              </a:spcAft>
+              <a:buNone/>
+            </a:pPr>
+            <a:r>
+              <a:rPr lang="en-US" sz="1400" dirty="0">
+                <a:solidFill>
+                  <a:schemeClr val="tx2"/>
+                </a:solidFill>
+              </a:rPr>
+              <a:t>Words → grammar → dialogue, with exercises</a:t>
+            </a:r>
+          </a:p>
+        </p:txBody>
+      </p:sp>
+      <p:sp>
+        <p:nvSpPr>
+          <p:cNvPr id="117" name="Card 117"/>
+          <p:cNvSpPr/>
+          <p:nvPr/>
+        </p:nvSpPr>
+        <p:spPr>
+          <a:xfrm>
+            <a:off x="2956560" y="1371600"/>
+            <a:ext cx="2225040" cy="2194560"/>
+          </a:xfrm>
+          <a:prstGeom prst="roundRect">
+            <a:avLst>
+              <a:gd name="adj" fmla="val 5000"/>
+            </a:avLst>
+          </a:prstGeom>
+          <a:solidFill>
+            <a:schemeClr val="bg2"/>
+          </a:solidFill>
+          <a:ln w="12700">
+            <a:solidFill>
+              <a:schemeClr val="bg2"/>
+            </a:solidFill>
+          </a:ln>
+        </p:spPr>
+      </p:sp>
+      <p:sp>
+        <p:nvSpPr>
+          <p:cNvPr id="118" name="Text 118"/>
+          <p:cNvSpPr txBox="1"/>
+          <p:nvPr/>
+        </p:nvSpPr>
+        <p:spPr>
+          <a:xfrm>
+            <a:off x="3185160" y="1645920"/>
+            <a:ext cx="1767840" cy="548640"/>
+          </a:xfrm>
+          <a:prstGeom prst="rect">
+            <a:avLst/>
+          </a:prstGeom>
+          <a:noFill/>
+        </p:spPr>
+        <p:txBody>
+          <a:bodyPr wrap="square" lIns="0" tIns="0" rIns="0" bIns="0" rtlCol="0" anchor="t"/>
+          <a:lstStyle/>
+          <a:p>
+            <a:pPr indent="0" marL="0">
+              <a:spcAft>
+                <a:spcPts val="0"/>
+              </a:spcAft>
+              <a:buNone/>
+            </a:pPr>
+            <a:r>
+              <a:rPr lang="en-US" sz="2400" b="1" dirty="0">
+                <a:solidFill>
+                  <a:schemeClr val="accent1"/>
+                </a:solidFill>
+                <a:latin typeface="Cambria" pitchFamily="34" charset="0"/>
+              </a:rPr>
+              <a:t>02</a:t>
+            </a:r>
+          </a:p>
+        </p:txBody>
+      </p:sp>
+      <p:sp>
+        <p:nvSpPr>
+          <p:cNvPr id="119" name="Text 119"/>
+          <p:cNvSpPr txBox="1"/>
+          <p:nvPr/>
+        </p:nvSpPr>
+        <p:spPr>
+          <a:xfrm>
+            <a:off x="3185160" y="2240280"/>
+            <a:ext cx="1767840" cy="1097280"/>
+          </a:xfrm>
+          <a:prstGeom prst="rect">
+            <a:avLst/>
+          </a:prstGeom>
+          <a:noFill/>
+        </p:spPr>
+        <p:txBody>
+          <a:bodyPr wrap="square" lIns="0" tIns="0" rIns="0" bIns="0" rtlCol="0" anchor="t"/>
+          <a:lstStyle/>
+          <a:p>
+            <a:pPr indent="0" marL="0">
+              <a:spcAft>
+                <a:spcPts val="600"/>
+              </a:spcAft>
+              <a:buNone/>
+            </a:pPr>
+            <a:r>
+              <a:rPr lang="en-US" sz="1700" b="1" dirty="0">
+                <a:solidFill>
+                  <a:schemeClr val="tx1"/>
+                </a:solidFill>
+              </a:rPr>
+              <a:t>Review</a:t>
+            </a:r>
+          </a:p>
+          <a:p>
+            <a:pPr indent="0" marL="0">
+              <a:spcAft>
+                <a:spcPts val="0"/>
+              </a:spcAft>
+              <a:buNone/>
+            </a:pPr>
+            <a:r>
+              <a:rPr lang="en-US" sz="1400" dirty="0">
+                <a:solidFill>
+                  <a:schemeClr val="tx2"/>
+                </a:solidFill>
+              </a:rPr>
+              <a:t>Spaced repetition so words stick</a:t>
+            </a:r>
+          </a:p>
+        </p:txBody>
+      </p:sp>
+      <p:sp>
+        <p:nvSpPr>
+          <p:cNvPr id="120" name="Card 120"/>
+          <p:cNvSpPr/>
+          <p:nvPr/>
+        </p:nvSpPr>
+        <p:spPr>
+          <a:xfrm>
+            <a:off x="5364480" y="1371600"/>
+            <a:ext cx="2225040" cy="2194560"/>
+          </a:xfrm>
+          <a:prstGeom prst="roundRect">
+            <a:avLst>
+              <a:gd name="adj" fmla="val 5000"/>
+            </a:avLst>
+          </a:prstGeom>
+          <a:solidFill>
+            <a:schemeClr val="bg2"/>
+          </a:solidFill>
+          <a:ln w="12700">
+            <a:solidFill>
+              <a:schemeClr val="bg2"/>
+            </a:solidFill>
+          </a:ln>
+        </p:spPr>
+      </p:sp>
+      <p:sp>
+        <p:nvSpPr>
+          <p:cNvPr id="121" name="Text 121"/>
+          <p:cNvSpPr txBox="1"/>
+          <p:nvPr/>
+        </p:nvSpPr>
+        <p:spPr>
+          <a:xfrm>
+            <a:off x="5593080" y="1645920"/>
+            <a:ext cx="1767840" cy="548640"/>
+          </a:xfrm>
+          <a:prstGeom prst="rect">
+            <a:avLst/>
+          </a:prstGeom>
+          <a:noFill/>
+        </p:spPr>
+        <p:txBody>
+          <a:bodyPr wrap="square" lIns="0" tIns="0" rIns="0" bIns="0" rtlCol="0" anchor="t"/>
+          <a:lstStyle/>
+          <a:p>
+            <a:pPr indent="0" marL="0">
+              <a:spcAft>
+                <a:spcPts val="0"/>
+              </a:spcAft>
+              <a:buNone/>
+            </a:pPr>
+            <a:r>
+              <a:rPr lang="en-US" sz="2400" b="1" dirty="0">
+                <a:solidFill>
+                  <a:schemeClr val="accent1"/>
+                </a:solidFill>
+                <a:latin typeface="Cambria" pitchFamily="34" charset="0"/>
+              </a:rPr>
+              <a:t>03</a:t>
+            </a:r>
+          </a:p>
+        </p:txBody>
+      </p:sp>
+      <p:sp>
+        <p:nvSpPr>
+          <p:cNvPr id="122" name="Text 122"/>
+          <p:cNvSpPr txBox="1"/>
+          <p:nvPr/>
+        </p:nvSpPr>
+        <p:spPr>
+          <a:xfrm>
+            <a:off x="5593080" y="2240280"/>
+            <a:ext cx="1767840" cy="1097280"/>
+          </a:xfrm>
+          <a:prstGeom prst="rect">
+            <a:avLst/>
+          </a:prstGeom>
+          <a:noFill/>
+        </p:spPr>
+        <p:txBody>
+          <a:bodyPr wrap="square" lIns="0" tIns="0" rIns="0" bIns="0" rtlCol="0" anchor="t"/>
+          <a:lstStyle/>
+          <a:p>
+            <a:pPr indent="0" marL="0">
+              <a:spcAft>
+                <a:spcPts val="600"/>
+              </a:spcAft>
+              <a:buNone/>
+            </a:pPr>
+            <a:r>
+              <a:rPr lang="en-US" sz="1700" b="1" dirty="0">
+                <a:solidFill>
+                  <a:schemeClr val="tx1"/>
+                </a:solidFill>
+              </a:rPr>
+              <a:t>Home</a:t>
+            </a:r>
+          </a:p>
+          <a:p>
+            <a:pPr indent="0" marL="0">
+              <a:spcAft>
+                <a:spcPts val="0"/>
+              </a:spcAft>
+              <a:buNone/>
+            </a:pPr>
+            <a:r>
+              <a:rPr lang="en-US" sz="1400" dirty="0">
+                <a:solidFill>
+                  <a:schemeClr val="tx2"/>
+                </a:solidFill>
+              </a:rPr>
+              <a:t>Today's lesson, words due, daily streak</a:t>
+            </a:r>
+          </a:p>
+        </p:txBody>
+      </p:sp>
+      <p:sp>
+        <p:nvSpPr>
+          <p:cNvPr id="123" name="Card 123"/>
+          <p:cNvSpPr/>
+          <p:nvPr/>
+        </p:nvSpPr>
+        <p:spPr>
+          <a:xfrm>
+            <a:off x="548640" y="3749040"/>
+            <a:ext cx="2225040" cy="2194560"/>
+          </a:xfrm>
+          <a:prstGeom prst="roundRect">
+            <a:avLst>
+              <a:gd name="adj" fmla="val 5000"/>
+            </a:avLst>
+          </a:prstGeom>
+          <a:solidFill>
+            <a:schemeClr val="bg2"/>
+          </a:solidFill>
+          <a:ln w="12700">
+            <a:solidFill>
+              <a:schemeClr val="bg2"/>
+            </a:solidFill>
+          </a:ln>
+        </p:spPr>
+      </p:sp>
+      <p:sp>
+        <p:nvSpPr>
+          <p:cNvPr id="124" name="Text 124"/>
+          <p:cNvSpPr txBox="1"/>
+          <p:nvPr/>
+        </p:nvSpPr>
+        <p:spPr>
+          <a:xfrm>
+            <a:off x="777240" y="4023360"/>
+            <a:ext cx="1767840" cy="548640"/>
+          </a:xfrm>
+          <a:prstGeom prst="rect">
+            <a:avLst/>
+          </a:prstGeom>
+          <a:noFill/>
+        </p:spPr>
+        <p:txBody>
+          <a:bodyPr wrap="square" lIns="0" tIns="0" rIns="0" bIns="0" rtlCol="0" anchor="t"/>
+          <a:lstStyle/>
+          <a:p>
+            <a:pPr indent="0" marL="0">
+              <a:spcAft>
+                <a:spcPts val="0"/>
+              </a:spcAft>
+              <a:buNone/>
+            </a:pPr>
+            <a:r>
+              <a:rPr lang="en-US" sz="2400" b="1" dirty="0">
+                <a:solidFill>
+                  <a:schemeClr val="accent1"/>
+                </a:solidFill>
+                <a:latin typeface="Cambria" pitchFamily="34" charset="0"/>
+              </a:rPr>
+              <a:t>04</a:t>
+            </a:r>
+          </a:p>
+        </p:txBody>
+      </p:sp>
+      <p:sp>
+        <p:nvSpPr>
+          <p:cNvPr id="125" name="Text 125"/>
+          <p:cNvSpPr txBox="1"/>
+          <p:nvPr/>
+        </p:nvSpPr>
+        <p:spPr>
+          <a:xfrm>
+            <a:off x="777240" y="4617720"/>
+            <a:ext cx="1767840" cy="1097280"/>
+          </a:xfrm>
+          <a:prstGeom prst="rect">
+            <a:avLst/>
+          </a:prstGeom>
+          <a:noFill/>
+        </p:spPr>
+        <p:txBody>
+          <a:bodyPr wrap="square" lIns="0" tIns="0" rIns="0" bIns="0" rtlCol="0" anchor="t"/>
+          <a:lstStyle/>
+          <a:p>
+            <a:pPr indent="0" marL="0">
+              <a:spcAft>
+                <a:spcPts val="600"/>
+              </a:spcAft>
+              <a:buNone/>
+            </a:pPr>
+            <a:r>
+              <a:rPr lang="en-US" sz="1700" b="1" dirty="0">
+                <a:solidFill>
+                  <a:schemeClr val="tx1"/>
+                </a:solidFill>
+              </a:rPr>
+              <a:t>My words</a:t>
+            </a:r>
+          </a:p>
+          <a:p>
+            <a:pPr indent="0" marL="0">
+              <a:spcAft>
+                <a:spcPts val="0"/>
+              </a:spcAft>
+              <a:buNone/>
+            </a:pPr>
+            <a:r>
+              <a:rPr lang="en-US" sz="1400" dirty="0">
+                <a:solidFill>
+                  <a:schemeClr val="tx2"/>
+                </a:solidFill>
+              </a:rPr>
+              <a:t>Add your own words to the review</a:t>
+            </a:r>
+          </a:p>
+        </p:txBody>
+      </p:sp>
+      <p:sp>
+        <p:nvSpPr>
+          <p:cNvPr id="126" name="Card 126"/>
+          <p:cNvSpPr/>
+          <p:nvPr/>
+        </p:nvSpPr>
+        <p:spPr>
+          <a:xfrm>
+            <a:off x="2956560" y="3749040"/>
+            <a:ext cx="2225040" cy="2194560"/>
+          </a:xfrm>
+          <a:prstGeom prst="roundRect">
+            <a:avLst>
+              <a:gd name="adj" fmla="val 5000"/>
+            </a:avLst>
+          </a:prstGeom>
+          <a:solidFill>
+            <a:schemeClr val="bg2"/>
+          </a:solidFill>
+          <a:ln w="12700">
+            <a:solidFill>
+              <a:schemeClr val="bg2"/>
+            </a:solidFill>
+          </a:ln>
+        </p:spPr>
+      </p:sp>
+      <p:sp>
+        <p:nvSpPr>
+          <p:cNvPr id="127" name="Text 127"/>
+          <p:cNvSpPr txBox="1"/>
+          <p:nvPr/>
+        </p:nvSpPr>
+        <p:spPr>
+          <a:xfrm>
+            <a:off x="3185160" y="4023360"/>
+            <a:ext cx="1767840" cy="548640"/>
+          </a:xfrm>
+          <a:prstGeom prst="rect">
+            <a:avLst/>
+          </a:prstGeom>
+          <a:noFill/>
+        </p:spPr>
+        <p:txBody>
+          <a:bodyPr wrap="square" lIns="0" tIns="0" rIns="0" bIns="0" rtlCol="0" anchor="t"/>
+          <a:lstStyle/>
+          <a:p>
+            <a:pPr indent="0" marL="0">
+              <a:spcAft>
+                <a:spcPts val="0"/>
+              </a:spcAft>
+              <a:buNone/>
+            </a:pPr>
+            <a:r>
+              <a:rPr lang="en-US" sz="2400" b="1" dirty="0">
+                <a:solidFill>
+                  <a:schemeClr val="accent1"/>
+                </a:solidFill>
+                <a:latin typeface="Cambria" pitchFamily="34" charset="0"/>
+              </a:rPr>
+              <a:t>05</a:t>
+            </a:r>
+          </a:p>
+        </p:txBody>
+      </p:sp>
+      <p:sp>
+        <p:nvSpPr>
+          <p:cNvPr id="128" name="Text 128"/>
+          <p:cNvSpPr txBox="1"/>
+          <p:nvPr/>
+        </p:nvSpPr>
+        <p:spPr>
+          <a:xfrm>
+            <a:off x="3185160" y="4617720"/>
+            <a:ext cx="1767840" cy="1097280"/>
+          </a:xfrm>
+          <a:prstGeom prst="rect">
+            <a:avLst/>
+          </a:prstGeom>
+          <a:noFill/>
+        </p:spPr>
+        <p:txBody>
+          <a:bodyPr wrap="square" lIns="0" tIns="0" rIns="0" bIns="0" rtlCol="0" anchor="t"/>
+          <a:lstStyle/>
+          <a:p>
+            <a:pPr indent="0" marL="0">
+              <a:spcAft>
+                <a:spcPts val="600"/>
+              </a:spcAft>
+              <a:buNone/>
+            </a:pPr>
+            <a:r>
+              <a:rPr lang="en-US" sz="1700" b="1" dirty="0">
+                <a:solidFill>
+                  <a:schemeClr val="tx1"/>
+                </a:solidFill>
+              </a:rPr>
+              <a:t>Listen + Sounds</a:t>
+            </a:r>
+          </a:p>
+          <a:p>
+            <a:pPr indent="0" marL="0">
+              <a:spcAft>
+                <a:spcPts val="0"/>
+              </a:spcAft>
+              <a:buNone/>
+            </a:pPr>
+            <a:r>
+              <a:rPr lang="en-US" sz="1400" dirty="0">
+                <a:solidFill>
+                  <a:schemeClr val="tx2"/>
+                </a:solidFill>
+              </a:rPr>
+              <a:t>Dutch voice and a pronunciation page</a:t>
+            </a:r>
+          </a:p>
+        </p:txBody>
+      </p:sp>
+      <p:sp>
+        <p:nvSpPr>
+          <p:cNvPr id="129" name="Card 129"/>
+          <p:cNvSpPr/>
+          <p:nvPr/>
+        </p:nvSpPr>
+        <p:spPr>
+          <a:xfrm>
+            <a:off x="5364480" y="3749040"/>
+            <a:ext cx="2225040" cy="2194560"/>
+          </a:xfrm>
+          <a:prstGeom prst="roundRect">
+            <a:avLst>
+              <a:gd name="adj" fmla="val 5000"/>
+            </a:avLst>
+          </a:prstGeom>
+          <a:solidFill>
+            <a:schemeClr val="bg2"/>
+          </a:solidFill>
+          <a:ln w="12700">
+            <a:solidFill>
+              <a:schemeClr val="bg2"/>
+            </a:solidFill>
+          </a:ln>
+        </p:spPr>
+      </p:sp>
+      <p:sp>
+        <p:nvSpPr>
+          <p:cNvPr id="130" name="Text 130"/>
+          <p:cNvSpPr txBox="1"/>
+          <p:nvPr/>
+        </p:nvSpPr>
+        <p:spPr>
+          <a:xfrm>
+            <a:off x="5593080" y="4023360"/>
+            <a:ext cx="1767840" cy="548640"/>
+          </a:xfrm>
+          <a:prstGeom prst="rect">
+            <a:avLst/>
+          </a:prstGeom>
+          <a:noFill/>
+        </p:spPr>
+        <p:txBody>
+          <a:bodyPr wrap="square" lIns="0" tIns="0" rIns="0" bIns="0" rtlCol="0" anchor="t"/>
+          <a:lstStyle/>
+          <a:p>
+            <a:pPr indent="0" marL="0">
+              <a:spcAft>
+                <a:spcPts val="0"/>
+              </a:spcAft>
+              <a:buNone/>
+            </a:pPr>
+            <a:r>
+              <a:rPr lang="en-US" sz="2400" b="1" dirty="0">
+                <a:solidFill>
+                  <a:schemeClr val="accent1"/>
+                </a:solidFill>
+                <a:latin typeface="Cambria" pitchFamily="34" charset="0"/>
+              </a:rPr>
+              <a:t>06</a:t>
+            </a:r>
+          </a:p>
+        </p:txBody>
+      </p:sp>
+      <p:sp>
+        <p:nvSpPr>
+          <p:cNvPr id="131" name="Text 131"/>
+          <p:cNvSpPr txBox="1"/>
+          <p:nvPr/>
+        </p:nvSpPr>
+        <p:spPr>
+          <a:xfrm>
+            <a:off x="5593080" y="4617720"/>
+            <a:ext cx="1767840" cy="1097280"/>
+          </a:xfrm>
+          <a:prstGeom prst="rect">
+            <a:avLst/>
+          </a:prstGeom>
+          <a:noFill/>
+        </p:spPr>
+        <p:txBody>
+          <a:bodyPr wrap="square" lIns="0" tIns="0" rIns="0" bIns="0" rtlCol="0" anchor="t"/>
+          <a:lstStyle/>
+          <a:p>
+            <a:pPr indent="0" marL="0">
+              <a:spcAft>
+                <a:spcPts val="600"/>
+              </a:spcAft>
+              <a:buNone/>
+            </a:pPr>
+            <a:r>
+              <a:rPr lang="en-US" sz="1700" b="1" dirty="0">
+                <a:solidFill>
+                  <a:schemeClr val="tx1"/>
+                </a:solidFill>
+              </a:rPr>
+              <a:t>Works offline</a:t>
+            </a:r>
+          </a:p>
+          <a:p>
+            <a:pPr indent="0" marL="0">
+              <a:spcAft>
+                <a:spcPts val="0"/>
+              </a:spcAft>
+              <a:buNone/>
+            </a:pPr>
+            <a:r>
+              <a:rPr lang="en-US" sz="1400" dirty="0">
+                <a:solidFill>
+                  <a:schemeClr val="tx2"/>
+                </a:solidFill>
+              </a:rPr>
+              <a:t>Install on phone, no login needed</a:t>
+            </a:r>
+          </a:p>
+        </p:txBody>
+      </p:sp>
+      <p:sp>
+        <p:nvSpPr>
+          <p:cNvPr id="132" name="Card 132"/>
+          <p:cNvSpPr/>
+          <p:nvPr/>
+        </p:nvSpPr>
+        <p:spPr>
+          <a:xfrm>
+            <a:off x="7955280" y="1371600"/>
+            <a:ext cx="3657600" cy="4572000"/>
+          </a:xfrm>
+          <a:prstGeom prst="roundRect">
+            <a:avLst>
+              <a:gd name="adj" fmla="val 3000"/>
+            </a:avLst>
+          </a:prstGeom>
+          <a:solidFill>
+            <a:schemeClr val="tx1"/>
+          </a:solidFill>
+          <a:ln w="12700">
+            <a:solidFill>
+              <a:schemeClr val="tx1"/>
+            </a:solidFill>
+          </a:ln>
+        </p:spPr>
+      </p:sp>
+      <p:sp>
+        <p:nvSpPr>
+          <p:cNvPr id="133" name="Text 133"/>
+          <p:cNvSpPr txBox="1"/>
+          <p:nvPr/>
+        </p:nvSpPr>
+        <p:spPr>
+          <a:xfrm>
+            <a:off x="8275320" y="1737360"/>
+            <a:ext cx="3017520" cy="3840480"/>
+          </a:xfrm>
+          <a:prstGeom prst="rect">
+            <a:avLst/>
+          </a:prstGeom>
+          <a:noFill/>
+        </p:spPr>
+        <p:txBody>
+          <a:bodyPr wrap="square" lIns="0" tIns="0" rIns="0" bIns="0" rtlCol="0" anchor="t"/>
+          <a:lstStyle/>
+          <a:p>
+            <a:pPr indent="0" marL="0">
+              <a:spcAft>
+                <a:spcPts val="1800"/>
+              </a:spcAft>
+              <a:buNone/>
+            </a:pPr>
+            <a:r>
+              <a:rPr lang="en-US" sz="2100" b="1" dirty="0">
+                <a:solidFill>
+                  <a:schemeClr val="accent1"/>
+                </a:solidFill>
+              </a:rPr>
+              <a:t>Live demo</a:t>
+            </a:r>
+          </a:p>
+          <a:p>
+            <a:pPr indent="0" marL="0">
+              <a:spcAft>
+                <a:spcPts val="1800"/>
+              </a:spcAft>
+              <a:buNone/>
+            </a:pPr>
+            <a:r>
+              <a:rPr lang="en-US" sz="2200" b="1" dirty="0">
+                <a:solidFill>
+                  <a:schemeClr val="bg1"/>
+                </a:solidFill>
+                <a:latin typeface="Cambria" pitchFamily="34" charset="0"/>
+              </a:rPr>
+              <a:t>dailydutch.vercel.app</a:t>
+            </a:r>
+          </a:p>
+          <a:p>
+            <a:pPr indent="0" marL="0">
+              <a:spcAft>
+                <a:spcPts val="1200"/>
+              </a:spcAft>
+              <a:buNone/>
+            </a:pPr>
+            <a:r>
+              <a:rPr lang="en-US" sz="1500" dirty="0">
+                <a:solidFill>
+                  <a:schemeClr val="bg1"/>
+                </a:solidFill>
+              </a:rPr>
+              <a:t>Open it on any phone or laptop. No login, no ads, free.</a:t>
+            </a:r>
+          </a:p>
+          <a:p>
+            <a:pPr indent="0" marL="0">
+              <a:spcAft>
+                <a:spcPts val="0"/>
+              </a:spcAft>
+              <a:buNone/>
+            </a:pPr>
+            <a:r>
+              <a:rPr lang="en-US" sz="1500" dirty="0">
+                <a:solidFill>
+                  <a:schemeClr val="bg1"/>
+                </a:solidFill>
+              </a:rPr>
+              <a:t>Demo: today's lesson → exercise → listen → review</a:t>
+            </a:r>
+          </a:p>
+        </p:txBody>
+      </p:sp>
+      <p:sp>
+        <p:nvSpPr>
+          <p:cNvPr id="25" name="Slide Number Placeholder 0"/>
+          <p:cNvSpPr>
+            <a:spLocks noGrp="1"/>
+          </p:cNvSpPr>
+          <p:nvPr>
+            <p:ph type="sldNum" sz="quarter" idx="4294967295"/>
+          </p:nvPr>
+        </p:nvSpPr>
+        <p:spPr>
+          <a:xfrm>
+            <a:off x="11155680" y="6400800"/>
+            <a:ext cx="457200" cy="274320"/>
+          </a:xfrm>
+          <a:prstGeom prst="rect">
+            <a:avLst/>
+          </a:prstGeom>
+          <a:extLst>
+            <a:ext uri="{C572A759-6A51-4108-AA02-DFA0A04FC94B}">
+              <ma14:wrappingTextBoxFlag xmlns:ma14="http://schemas.microsoft.com/office/mac/drawingml/2011/main" val="0"/>
+            </a:ext>
+          </a:extLst>
+        </p:spPr>
+        <p:txBody>
+          <a:bodyPr/>
+          <a:lstStyle>
+            <a:lvl1pPr>
+              <a:defRPr sz="1000">
+                <a:solidFill>
+                  <a:schemeClr val="tx2"/>
+                </a:solidFill>
+              </a:defRPr>
+            </a:lvl1pPr>
+          </a:lstStyle>
+          <a:p>
+            <a:pPr algn="r"/>
+            <a:fld id="{F7021451-1387-4CA6-816F-3879F97B5CBC}" type="slidenum">
+              <a:rPr b="0" lang="en-US"/>
+              <a:t>3</a:t>
+            </a:fld>
+            <a:endParaRPr lang="en-US"/>
           </a:p>
         </p:txBody>
       </p:sp>
@@ -5151,7 +6078,7 @@
                   <a:schemeClr val="tx2"/>
                 </a:solidFill>
               </a:rPr>
-              <a:t>Milestones reached on time: charter approved 15 Oct · first version 24 Oct · tested 27 Oct · live 28 Oct · closed 29 Oct</a:t>
+              <a:t>Milestones: charter 15 Oct · first version 24 Oct · tested 27 Oct · live planned 28 Oct, actual 31 Oct (+3 days)</a:t>
             </a:r>
             <a:endParaRPr lang="en-US" sz="1300" dirty="0"/>
           </a:p>
@@ -6446,7 +7373,7 @@
                   <a:schemeClr val="accent1"/>
                 </a:solidFill>
               </a:rPr>
-              <a:t>Launch · 28 Oct</a:t>
+              <a:t>Launch · 31 Oct (planned 28 Oct)</a:t>
             </a:r>
             <a:endParaRPr lang="en-US" sz="2100" dirty="0"/>
           </a:p>
@@ -6486,7 +7413,7 @@
                   <a:schemeClr val="bg1"/>
                 </a:solidFill>
               </a:rPr>
-              <a:t>Published online with Vercel (free hosting)</a:t>
+              <a:t>Live at dailydutch.vercel.app (Vercel, free hosting)</a:t>
             </a:r>
             <a:endParaRPr lang="en-US" sz="1600" dirty="0"/>
           </a:p>
@@ -7049,7 +7976,7 @@
                   <a:schemeClr val="bg1"/>
                 </a:solidFill>
               </a:rPr>
-              <a:t>on time · €0 budget</a:t>
+              <a:t>live 3 days late · €0 budget</a:t>
             </a:r>
             <a:endParaRPr lang="en-US" sz="1700" dirty="0"/>
           </a:p>
@@ -7380,7 +8307,7 @@
                 <a:ea typeface="Cambria" pitchFamily="34" charset="-122"/>
                 <a:cs typeface="Cambria" pitchFamily="34" charset="-120"/>
               </a:rPr>
-              <a:t>Dank je wel — questions?</a:t>
+              <a:t>Dank je wel — questions? · dailydutch.vercel.app</a:t>
             </a:r>
             <a:endParaRPr lang="en-US" sz="2200" dirty="0"/>
           </a:p>
@@ -7426,6 +8353,667 @@
             <a:fld id="{F7021451-1387-4CA6-816F-3879F97B5CBC}" type="slidenum">
               <a:rPr b="0" lang="en-US"/>
               <a:t>8</a:t>
+            </a:fld>
+            <a:endParaRPr lang="en-US"/>
+          </a:p>
+        </p:txBody>
+      </p:sp>
+    </p:spTree>
+  </p:cSld>
+  <p:clrMapOvr>
+    <a:masterClrMapping/>
+  </p:clrMapOvr>
+</p:sld>
+</file>
+
+<file path=ppt/slides/slide9.xml><?xml version="1.0" encoding="utf-8"?>
+<p:sld xmlns:a="http://schemas.openxmlformats.org/drawingml/2006/main" xmlns:r="http://schemas.openxmlformats.org/officeDocument/2006/relationships" xmlns:p="http://schemas.openxmlformats.org/presentationml/2006/main">
+  <p:cSld name="Slide 3">
+    <p:spTree>
+      <p:nvGrpSpPr>
+        <p:cNvPr id="1" name=""/>
+        <p:cNvGrpSpPr/>
+        <p:nvPr/>
+      </p:nvGrpSpPr>
+      <p:grpSpPr>
+        <a:xfrm>
+          <a:off x="0" y="0"/>
+          <a:ext cx="0" cy="0"/>
+          <a:chOff x="0" y="0"/>
+          <a:chExt cx="0" cy="0"/>
+        </a:xfrm>
+      </p:grpSpPr>
+      <p:sp>
+        <p:nvSpPr>
+          <p:cNvPr id="2" name="Text 0"/>
+          <p:cNvSpPr/>
+          <p:nvPr>
+            <p:ph idx="100" type="title" hasCustomPrompt="1"/>
+          </p:nvPr>
+        </p:nvSpPr>
+        <p:spPr>
+          <a:xfrm>
+            <a:off x="548640" y="320040"/>
+            <a:ext cx="11064240" cy="822960"/>
+          </a:xfrm>
+          <a:prstGeom prst="rect">
+            <a:avLst/>
+          </a:prstGeom>
+          <a:noFill/>
+          <a:ln/>
+        </p:spPr>
+        <p:txBody>
+          <a:bodyPr wrap="square" rtlCol="0" anchor="ctr"/>
+          <a:lstStyle/>
+          <a:p>
+            <a:pPr indent="0" marL="0">
+              <a:buNone/>
+            </a:pPr>
+            <a:r>
+              <a:rPr lang="en-US" sz="3400" b="1" dirty="0">
+                <a:solidFill>
+                  <a:schemeClr val="tx1"/>
+                </a:solidFill>
+                <a:latin typeface="Cambria" pitchFamily="34" charset="0"/>
+                <a:ea typeface="Cambria" pitchFamily="34" charset="-122"/>
+                <a:cs typeface="Cambria" pitchFamily="34" charset="-120"/>
+              </a:rPr>
+              <a:t>How I worked: method and roles</a:t>
+            </a:r>
+            <a:endParaRPr lang="en-US" sz="3400" dirty="0"/>
+          </a:p>
+        </p:txBody>
+      </p:sp>
+      <p:sp>
+        <p:nvSpPr>
+          <p:cNvPr id="101" name="Card 101"/>
+          <p:cNvSpPr/>
+          <p:nvPr/>
+        </p:nvSpPr>
+        <p:spPr>
+          <a:xfrm>
+            <a:off x="548640" y="1371600"/>
+            <a:ext cx="5349240" cy="4572000"/>
+          </a:xfrm>
+          <a:prstGeom prst="roundRect">
+            <a:avLst>
+              <a:gd name="adj" fmla="val 2400"/>
+            </a:avLst>
+          </a:prstGeom>
+          <a:solidFill>
+            <a:schemeClr val="bg2"/>
+          </a:solidFill>
+          <a:ln w="12700">
+            <a:solidFill>
+              <a:schemeClr val="bg2"/>
+            </a:solidFill>
+          </a:ln>
+        </p:spPr>
+      </p:sp>
+      <p:sp>
+        <p:nvSpPr>
+          <p:cNvPr id="102" name="Text 102"/>
+          <p:cNvSpPr txBox="1"/>
+          <p:nvPr/>
+        </p:nvSpPr>
+        <p:spPr>
+          <a:xfrm>
+            <a:off x="868680" y="1645920"/>
+            <a:ext cx="4709160" cy="457200"/>
+          </a:xfrm>
+          <a:prstGeom prst="rect">
+            <a:avLst/>
+          </a:prstGeom>
+          <a:noFill/>
+        </p:spPr>
+        <p:txBody>
+          <a:bodyPr wrap="square" lIns="0" tIns="0" rIns="0" bIns="0" rtlCol="0" anchor="t"/>
+          <a:lstStyle/>
+          <a:p>
+            <a:pPr indent="0" marL="0">
+              <a:spcAft>
+                <a:spcPts val="0"/>
+              </a:spcAft>
+              <a:buNone/>
+            </a:pPr>
+            <a:r>
+              <a:rPr lang="en-US" sz="2100" b="1" dirty="0">
+                <a:solidFill>
+                  <a:schemeClr val="accent1"/>
+                </a:solidFill>
+              </a:rPr>
+              <a:t>Method: iterative, Agile-style</a:t>
+            </a:r>
+          </a:p>
+        </p:txBody>
+      </p:sp>
+      <p:sp>
+        <p:nvSpPr>
+          <p:cNvPr id="103" name="Text 103"/>
+          <p:cNvSpPr txBox="1"/>
+          <p:nvPr/>
+        </p:nvSpPr>
+        <p:spPr>
+          <a:xfrm>
+            <a:off x="868680" y="2240280"/>
+            <a:ext cx="4709160" cy="3474720"/>
+          </a:xfrm>
+          <a:prstGeom prst="rect">
+            <a:avLst/>
+          </a:prstGeom>
+          <a:noFill/>
+        </p:spPr>
+        <p:txBody>
+          <a:bodyPr wrap="square" lIns="0" tIns="0" rIns="0" bIns="0" rtlCol="0" anchor="t"/>
+          <a:lstStyle/>
+          <a:p>
+            <a:pPr marL="342900" indent="-342900">
+              <a:spcAft>
+                <a:spcPts val="1000"/>
+              </a:spcAft>
+              <a:buSzPct val="100000"/>
+              <a:buChar char="•"/>
+            </a:pPr>
+            <a:r>
+              <a:rPr lang="en-US" sz="1600" dirty="0">
+                <a:solidFill>
+                  <a:schemeClr val="tx1"/>
+                </a:solidFill>
+              </a:rPr>
+              <a:t>Build a small working version first (MVP): lesson format, 3 lessons, review</a:t>
+            </a:r>
+          </a:p>
+          <a:p>
+            <a:pPr marL="342900" indent="-342900">
+              <a:spcAft>
+                <a:spcPts val="1000"/>
+              </a:spcAft>
+              <a:buSzPct val="100000"/>
+              <a:buChar char="•"/>
+            </a:pPr>
+            <a:r>
+              <a:rPr lang="en-US" sz="1600" dirty="0">
+                <a:solidFill>
+                  <a:schemeClr val="tx1"/>
+                </a:solidFill>
+              </a:rPr>
+              <a:t>Then grow in small steps: more lessons, audio, phone use</a:t>
+            </a:r>
+          </a:p>
+          <a:p>
+            <a:pPr marL="342900" indent="-342900">
+              <a:spcAft>
+                <a:spcPts val="1000"/>
+              </a:spcAft>
+              <a:buSzPct val="100000"/>
+              <a:buChar char="•"/>
+            </a:pPr>
+            <a:r>
+              <a:rPr lang="en-US" sz="1600" dirty="0">
+                <a:solidFill>
+                  <a:schemeClr val="tx1"/>
+                </a:solidFill>
+              </a:rPr>
+              <a:t>MoSCoW priorities to keep scope under control</a:t>
+            </a:r>
+          </a:p>
+          <a:p>
+            <a:pPr marL="342900" indent="-342900">
+              <a:spcAft>
+                <a:spcPts val="1000"/>
+              </a:spcAft>
+              <a:buSzPct val="100000"/>
+              <a:buChar char="•"/>
+            </a:pPr>
+            <a:r>
+              <a:rPr lang="en-US" sz="1600" dirty="0">
+                <a:solidFill>
+                  <a:schemeClr val="tx1"/>
+                </a:solidFill>
+              </a:rPr>
+              <a:t>Progress tracked in PLAN.md (Done / Next) and Git commits</a:t>
+            </a:r>
+          </a:p>
+        </p:txBody>
+      </p:sp>
+      <p:sp>
+        <p:nvSpPr>
+          <p:cNvPr id="104" name="Text 104"/>
+          <p:cNvSpPr txBox="1"/>
+          <p:nvPr/>
+        </p:nvSpPr>
+        <p:spPr>
+          <a:xfrm>
+            <a:off x="6263640" y="1645920"/>
+            <a:ext cx="5349240" cy="457200"/>
+          </a:xfrm>
+          <a:prstGeom prst="rect">
+            <a:avLst/>
+          </a:prstGeom>
+          <a:noFill/>
+        </p:spPr>
+        <p:txBody>
+          <a:bodyPr wrap="square" lIns="0" tIns="0" rIns="0" bIns="0" rtlCol="0" anchor="t"/>
+          <a:lstStyle/>
+          <a:p>
+            <a:pPr indent="0" marL="0">
+              <a:spcAft>
+                <a:spcPts val="0"/>
+              </a:spcAft>
+              <a:buNone/>
+            </a:pPr>
+            <a:r>
+              <a:rPr lang="en-US" sz="2100" b="1" dirty="0">
+                <a:solidFill>
+                  <a:schemeClr val="tx1"/>
+                </a:solidFill>
+              </a:rPr>
+              <a:t>One person, four roles</a:t>
+            </a:r>
+          </a:p>
+        </p:txBody>
+      </p:sp>
+      <p:sp>
+        <p:nvSpPr>
+          <p:cNvPr id="105" name="Card 105"/>
+          <p:cNvSpPr/>
+          <p:nvPr/>
+        </p:nvSpPr>
+        <p:spPr>
+          <a:xfrm>
+            <a:off x="6263640" y="2240280"/>
+            <a:ext cx="2583180" cy="1234440"/>
+          </a:xfrm>
+          <a:prstGeom prst="roundRect">
+            <a:avLst>
+              <a:gd name="adj" fmla="val 6000"/>
+            </a:avLst>
+          </a:prstGeom>
+          <a:solidFill>
+            <a:schemeClr val="tx1"/>
+          </a:solidFill>
+          <a:ln w="12700">
+            <a:solidFill>
+              <a:schemeClr val="tx1"/>
+            </a:solidFill>
+          </a:ln>
+        </p:spPr>
+      </p:sp>
+      <p:sp>
+        <p:nvSpPr>
+          <p:cNvPr id="106" name="Text 106"/>
+          <p:cNvSpPr txBox="1"/>
+          <p:nvPr/>
+        </p:nvSpPr>
+        <p:spPr>
+          <a:xfrm>
+            <a:off x="6492240" y="2468880"/>
+            <a:ext cx="2125980" cy="777240"/>
+          </a:xfrm>
+          <a:prstGeom prst="rect">
+            <a:avLst/>
+          </a:prstGeom>
+          <a:noFill/>
+        </p:spPr>
+        <p:txBody>
+          <a:bodyPr wrap="square" lIns="0" tIns="0" rIns="0" bIns="0" rtlCol="0" anchor="t"/>
+          <a:lstStyle/>
+          <a:p>
+            <a:pPr indent="0" marL="0">
+              <a:spcAft>
+                <a:spcPts val="600"/>
+              </a:spcAft>
+              <a:buNone/>
+            </a:pPr>
+            <a:r>
+              <a:rPr lang="en-US" sz="1700" b="1" dirty="0">
+                <a:solidFill>
+                  <a:schemeClr val="accent1"/>
+                </a:solidFill>
+              </a:rPr>
+              <a:t>Project manager</a:t>
+            </a:r>
+          </a:p>
+          <a:p>
+            <a:pPr indent="0" marL="0">
+              <a:spcAft>
+                <a:spcPts val="0"/>
+              </a:spcAft>
+              <a:buNone/>
+            </a:pPr>
+            <a:r>
+              <a:rPr lang="en-US" sz="1400" dirty="0">
+                <a:solidFill>
+                  <a:schemeClr val="bg1"/>
+                </a:solidFill>
+              </a:rPr>
+              <a:t>Plan, schedule, risks, reporting</a:t>
+            </a:r>
+          </a:p>
+        </p:txBody>
+      </p:sp>
+      <p:sp>
+        <p:nvSpPr>
+          <p:cNvPr id="107" name="Card 107"/>
+          <p:cNvSpPr/>
+          <p:nvPr/>
+        </p:nvSpPr>
+        <p:spPr>
+          <a:xfrm>
+            <a:off x="9029700" y="2240280"/>
+            <a:ext cx="2583180" cy="1234440"/>
+          </a:xfrm>
+          <a:prstGeom prst="roundRect">
+            <a:avLst>
+              <a:gd name="adj" fmla="val 6000"/>
+            </a:avLst>
+          </a:prstGeom>
+          <a:solidFill>
+            <a:schemeClr val="bg2"/>
+          </a:solidFill>
+          <a:ln w="12700">
+            <a:solidFill>
+              <a:schemeClr val="bg2"/>
+            </a:solidFill>
+          </a:ln>
+        </p:spPr>
+      </p:sp>
+      <p:sp>
+        <p:nvSpPr>
+          <p:cNvPr id="108" name="Text 108"/>
+          <p:cNvSpPr txBox="1"/>
+          <p:nvPr/>
+        </p:nvSpPr>
+        <p:spPr>
+          <a:xfrm>
+            <a:off x="9258300" y="2468880"/>
+            <a:ext cx="2125980" cy="777240"/>
+          </a:xfrm>
+          <a:prstGeom prst="rect">
+            <a:avLst/>
+          </a:prstGeom>
+          <a:noFill/>
+        </p:spPr>
+        <p:txBody>
+          <a:bodyPr wrap="square" lIns="0" tIns="0" rIns="0" bIns="0" rtlCol="0" anchor="t"/>
+          <a:lstStyle/>
+          <a:p>
+            <a:pPr indent="0" marL="0">
+              <a:spcAft>
+                <a:spcPts val="600"/>
+              </a:spcAft>
+              <a:buNone/>
+            </a:pPr>
+            <a:r>
+              <a:rPr lang="en-US" sz="1700" b="1" dirty="0">
+                <a:solidFill>
+                  <a:schemeClr val="tx1"/>
+                </a:solidFill>
+              </a:rPr>
+              <a:t>Developer</a:t>
+            </a:r>
+          </a:p>
+          <a:p>
+            <a:pPr indent="0" marL="0">
+              <a:spcAft>
+                <a:spcPts val="0"/>
+              </a:spcAft>
+              <a:buNone/>
+            </a:pPr>
+            <a:r>
+              <a:rPr lang="en-US" sz="1400" dirty="0">
+                <a:solidFill>
+                  <a:schemeClr val="tx2"/>
+                </a:solidFill>
+              </a:rPr>
+              <a:t>App, tooling, tests, deployment</a:t>
+            </a:r>
+          </a:p>
+        </p:txBody>
+      </p:sp>
+      <p:sp>
+        <p:nvSpPr>
+          <p:cNvPr id="109" name="Card 109"/>
+          <p:cNvSpPr/>
+          <p:nvPr/>
+        </p:nvSpPr>
+        <p:spPr>
+          <a:xfrm>
+            <a:off x="6263640" y="3657600"/>
+            <a:ext cx="2583180" cy="1234440"/>
+          </a:xfrm>
+          <a:prstGeom prst="roundRect">
+            <a:avLst>
+              <a:gd name="adj" fmla="val 6000"/>
+            </a:avLst>
+          </a:prstGeom>
+          <a:solidFill>
+            <a:schemeClr val="bg2"/>
+          </a:solidFill>
+          <a:ln w="12700">
+            <a:solidFill>
+              <a:schemeClr val="bg2"/>
+            </a:solidFill>
+          </a:ln>
+        </p:spPr>
+      </p:sp>
+      <p:sp>
+        <p:nvSpPr>
+          <p:cNvPr id="110" name="Text 110"/>
+          <p:cNvSpPr txBox="1"/>
+          <p:nvPr/>
+        </p:nvSpPr>
+        <p:spPr>
+          <a:xfrm>
+            <a:off x="6492240" y="3886200"/>
+            <a:ext cx="2125980" cy="777240"/>
+          </a:xfrm>
+          <a:prstGeom prst="rect">
+            <a:avLst/>
+          </a:prstGeom>
+          <a:noFill/>
+        </p:spPr>
+        <p:txBody>
+          <a:bodyPr wrap="square" lIns="0" tIns="0" rIns="0" bIns="0" rtlCol="0" anchor="t"/>
+          <a:lstStyle/>
+          <a:p>
+            <a:pPr indent="0" marL="0">
+              <a:spcAft>
+                <a:spcPts val="600"/>
+              </a:spcAft>
+              <a:buNone/>
+            </a:pPr>
+            <a:r>
+              <a:rPr lang="en-US" sz="1700" b="1" dirty="0">
+                <a:solidFill>
+                  <a:schemeClr val="tx1"/>
+                </a:solidFill>
+              </a:rPr>
+              <a:t>Content author</a:t>
+            </a:r>
+          </a:p>
+          <a:p>
+            <a:pPr indent="0" marL="0">
+              <a:spcAft>
+                <a:spcPts val="0"/>
+              </a:spcAft>
+              <a:buNone/>
+            </a:pPr>
+            <a:r>
+              <a:rPr lang="en-US" sz="1400" dirty="0">
+                <a:solidFill>
+                  <a:schemeClr val="tx2"/>
+                </a:solidFill>
+              </a:rPr>
+              <a:t>120 lessons, word list, Dutch quality</a:t>
+            </a:r>
+          </a:p>
+        </p:txBody>
+      </p:sp>
+      <p:sp>
+        <p:nvSpPr>
+          <p:cNvPr id="111" name="Card 111"/>
+          <p:cNvSpPr/>
+          <p:nvPr/>
+        </p:nvSpPr>
+        <p:spPr>
+          <a:xfrm>
+            <a:off x="9029700" y="3657600"/>
+            <a:ext cx="2583180" cy="1234440"/>
+          </a:xfrm>
+          <a:prstGeom prst="roundRect">
+            <a:avLst>
+              <a:gd name="adj" fmla="val 6000"/>
+            </a:avLst>
+          </a:prstGeom>
+          <a:solidFill>
+            <a:schemeClr val="bg2"/>
+          </a:solidFill>
+          <a:ln w="12700">
+            <a:solidFill>
+              <a:schemeClr val="bg2"/>
+            </a:solidFill>
+          </a:ln>
+        </p:spPr>
+      </p:sp>
+      <p:sp>
+        <p:nvSpPr>
+          <p:cNvPr id="112" name="Text 112"/>
+          <p:cNvSpPr txBox="1"/>
+          <p:nvPr/>
+        </p:nvSpPr>
+        <p:spPr>
+          <a:xfrm>
+            <a:off x="9258300" y="3886200"/>
+            <a:ext cx="2125980" cy="777240"/>
+          </a:xfrm>
+          <a:prstGeom prst="rect">
+            <a:avLst/>
+          </a:prstGeom>
+          <a:noFill/>
+        </p:spPr>
+        <p:txBody>
+          <a:bodyPr wrap="square" lIns="0" tIns="0" rIns="0" bIns="0" rtlCol="0" anchor="t"/>
+          <a:lstStyle/>
+          <a:p>
+            <a:pPr indent="0" marL="0">
+              <a:spcAft>
+                <a:spcPts val="600"/>
+              </a:spcAft>
+              <a:buNone/>
+            </a:pPr>
+            <a:r>
+              <a:rPr lang="en-US" sz="1700" b="1" dirty="0">
+                <a:solidFill>
+                  <a:schemeClr val="tx1"/>
+                </a:solidFill>
+              </a:rPr>
+              <a:t>Tester</a:t>
+            </a:r>
+          </a:p>
+          <a:p>
+            <a:pPr indent="0" marL="0">
+              <a:spcAft>
+                <a:spcPts val="0"/>
+              </a:spcAft>
+              <a:buNone/>
+            </a:pPr>
+            <a:r>
+              <a:rPr lang="en-US" sz="1400" dirty="0">
+                <a:solidFill>
+                  <a:schemeClr val="tx2"/>
+                </a:solidFill>
+              </a:rPr>
+              <a:t>Automatic checks, read-through, real use</a:t>
+            </a:r>
+          </a:p>
+        </p:txBody>
+      </p:sp>
+      <p:sp>
+        <p:nvSpPr>
+          <p:cNvPr id="113" name="Text 113"/>
+          <p:cNvSpPr txBox="1"/>
+          <p:nvPr/>
+        </p:nvSpPr>
+        <p:spPr>
+          <a:xfrm>
+            <a:off x="6263640" y="5120640"/>
+            <a:ext cx="5349240" cy="640080"/>
+          </a:xfrm>
+          <a:prstGeom prst="rect">
+            <a:avLst/>
+          </a:prstGeom>
+          <a:noFill/>
+        </p:spPr>
+        <p:txBody>
+          <a:bodyPr wrap="square" lIns="0" tIns="0" rIns="0" bIns="0" rtlCol="0" anchor="t"/>
+          <a:lstStyle/>
+          <a:p>
+            <a:pPr indent="0" marL="0">
+              <a:spcAft>
+                <a:spcPts val="0"/>
+              </a:spcAft>
+              <a:buNone/>
+            </a:pPr>
+            <a:r>
+              <a:rPr lang="en-US" sz="1400" b="1" dirty="0">
+                <a:solidFill>
+                  <a:schemeClr val="tx1"/>
+                </a:solidFill>
+              </a:rPr>
+              <a:t>Feedback from: </a:t>
+            </a:r>
+            <a:r>
+              <a:rPr lang="en-US" sz="1400" dirty="0">
+                <a:solidFill>
+                  <a:schemeClr val="tx2"/>
+                </a:solidFill>
+              </a:rPr>
+              <a:t>course lecturer (sponsor), classmates and test users</a:t>
+            </a:r>
+          </a:p>
+        </p:txBody>
+      </p:sp>
+      <p:sp>
+        <p:nvSpPr>
+          <p:cNvPr id="25" name="Slide Number Placeholder 0"/>
+          <p:cNvSpPr>
+            <a:spLocks noGrp="1"/>
+          </p:cNvSpPr>
+          <p:nvPr>
+            <p:ph type="sldNum" sz="quarter" idx="4294967295"/>
+          </p:nvPr>
+        </p:nvSpPr>
+        <p:spPr>
+          <a:xfrm>
+            <a:off x="11155680" y="6400800"/>
+            <a:ext cx="457200" cy="274320"/>
+          </a:xfrm>
+          <a:prstGeom prst="rect">
+            <a:avLst/>
+          </a:prstGeom>
+          <a:extLst>
+            <a:ext uri="{C572A759-6A51-4108-AA02-DFA0A04FC94B}">
+              <ma14:wrappingTextBoxFlag xmlns:ma14="http://schemas.microsoft.com/office/mac/drawingml/2011/main" val="0"/>
+            </a:ext>
+          </a:extLst>
+        </p:spPr>
+        <p:txBody>
+          <a:bodyPr/>
+          <a:lstStyle>
+            <a:lvl1pPr>
+              <a:defRPr sz="1000">
+                <a:solidFill>
+                  <a:schemeClr val="tx2"/>
+                </a:solidFill>
+              </a:defRPr>
+            </a:lvl1pPr>
+          </a:lstStyle>
+          <a:p>
+            <a:pPr algn="r"/>
+            <a:fld id="{F7021451-1387-4CA6-816F-3879F97B5CBC}" type="slidenum">
+              <a:rPr b="0" lang="en-US"/>
+              <a:t>3</a:t>
             </a:fld>
             <a:endParaRPr lang="en-US"/>
           </a:p>
